--- a/curso/pptx/S82.pptx
+++ b/curso/pptx/S82.pptx
@@ -7181,7 +7181,7 @@
                 </a:solidFill>
                 <a:latin typeface="Nunito Sans"/>
               </a:rPr>
-              <a:t>Diferentes, pero iguales:</a:t>
+              <a:t>不同，但平等：</a:t>
             </a:r>
             <a:r>
               <a:rPr sz="2800" b="0">
@@ -7190,7 +7190,7 @@
                 </a:solidFill>
                 <a:latin typeface="Nunito Sans"/>
               </a:rPr>
-              <a:t> en derechos y en dignidad</a:t>
+              <a:t>在权利和尊严上</a:t>
             </a:r>
           </a:p>
           <a:p>
@@ -7215,7 +7215,7 @@
                 </a:solidFill>
                 <a:latin typeface="Nunito Sans"/>
               </a:rPr>
-              <a:t>En España, las mujeres votaron por primera vez en </a:t>
+              <a:t>在西班牙，女性第一次投票是在</a:t>
             </a:r>
             <a:r>
               <a:rPr sz="2800" b="1">
@@ -7224,7 +7224,7 @@
                 </a:solidFill>
                 <a:latin typeface="Nunito Sans"/>
               </a:rPr>
-              <a:t>1933</a:t>
+              <a:t>1933年</a:t>
             </a:r>
           </a:p>
           <a:p>
@@ -7249,7 +7249,7 @@
                 </a:solidFill>
                 <a:latin typeface="Nunito Sans"/>
               </a:rPr>
-              <a:t>Una ley igual no basta: hay que mirar la </a:t>
+              <a:t>法律上平等还不够：要看</a:t>
             </a:r>
             <a:r>
               <a:rPr sz="2800" b="1">
@@ -7258,7 +7258,7 @@
                 </a:solidFill>
                 <a:latin typeface="Nunito Sans"/>
               </a:rPr>
-              <a:t>vida real</a:t>
+              <a:t>现实生活</a:t>
             </a:r>
           </a:p>
         </p:txBody>
@@ -7467,7 +7467,7 @@
                 </a:solidFill>
                 <a:latin typeface="Nunito Sans"/>
               </a:rPr>
-              <a:t>Sueldo:</a:t>
+              <a:t>工资：</a:t>
             </a:r>
             <a:r>
               <a:rPr sz="2800" b="0">
@@ -7476,7 +7476,7 @@
                 </a:solidFill>
                 <a:latin typeface="Nunito Sans"/>
               </a:rPr>
-              <a:t> de media, las mujeres cobran menos al año que los hombres</a:t>
+              <a:t>平均来说，女性一年挣得比男性少</a:t>
             </a:r>
           </a:p>
           <a:p>
@@ -7501,7 +7501,7 @@
                 </a:solidFill>
                 <a:latin typeface="Nunito Sans"/>
               </a:rPr>
-              <a:t>Jornada parcial:</a:t>
+              <a:t>非全日制工作：</a:t>
             </a:r>
             <a:r>
               <a:rPr sz="2800" b="0">
@@ -7510,7 +7510,7 @@
                 </a:solidFill>
                 <a:latin typeface="Nunito Sans"/>
               </a:rPr>
-              <a:t> la tienen muchas más mujeres que hombres</a:t>
+              <a:t>从事的女性比男性多得多</a:t>
             </a:r>
           </a:p>
           <a:p>
@@ -7535,7 +7535,7 @@
                 </a:solidFill>
                 <a:latin typeface="Nunito Sans"/>
               </a:rPr>
-              <a:t>Tiempo:</a:t>
+              <a:t>时间：</a:t>
             </a:r>
             <a:r>
               <a:rPr sz="2800" b="0">
@@ -7544,7 +7544,7 @@
                 </a:solidFill>
                 <a:latin typeface="Nunito Sans"/>
               </a:rPr>
-              <a:t> las mujeres dedican más horas a la casa y a cuidar</a:t>
+              <a:t>女性花在家务和照顾人上的时间更多</a:t>
             </a:r>
           </a:p>
           <a:p>
@@ -7569,7 +7569,7 @@
                 </a:solidFill>
                 <a:latin typeface="Nunito Sans"/>
               </a:rPr>
-              <a:t>Cuidar a los hijos:</a:t>
+              <a:t>照顾孩子：</a:t>
             </a:r>
             <a:r>
               <a:rPr sz="2800" b="0">
@@ -7578,7 +7578,7 @@
                 </a:solidFill>
                 <a:latin typeface="Nunito Sans"/>
               </a:rPr>
-              <a:t> la gran mayoría de quienes piden excedencia son mujeres</a:t>
+              <a:t>申请育儿休假（excedencia）的人绝大多数是女性</a:t>
             </a:r>
           </a:p>
         </p:txBody>
@@ -7812,7 +7812,7 @@
                 </a:solidFill>
                 <a:latin typeface="Nunito Sans"/>
               </a:rPr>
-              <a:t>Nace de las protestas de </a:t>
+              <a:t>它起源于20世纪初</a:t>
             </a:r>
             <a:r>
               <a:rPr sz="2800" b="1">
@@ -7821,7 +7821,7 @@
                 </a:solidFill>
                 <a:latin typeface="Nunito Sans"/>
               </a:rPr>
-              <a:t>mujeres trabajadoras</a:t>
+              <a:t>女工</a:t>
             </a:r>
             <a:r>
               <a:rPr sz="2800" b="0">
@@ -7830,7 +7830,7 @@
                 </a:solidFill>
                 <a:latin typeface="Nunito Sans"/>
               </a:rPr>
-              <a:t> a principios del siglo XX</a:t>
+              <a:t>的抗议</a:t>
             </a:r>
           </a:p>
           <a:p>
@@ -7849,13 +7849,22 @@
               <a:t>• </a:t>
             </a:r>
             <a:r>
+              <a:rPr sz="2800" b="1">
+                <a:solidFill>
+                  <a:srgbClr val="1F2A44"/>
+                </a:solidFill>
+                <a:latin typeface="Nunito Sans"/>
+              </a:rPr>
+              <a:t>联合国</a:t>
+            </a:r>
+            <a:r>
               <a:rPr sz="2800" b="0">
                 <a:solidFill>
                   <a:srgbClr val="1F2A44"/>
                 </a:solidFill>
                 <a:latin typeface="Nunito Sans"/>
               </a:rPr>
-              <a:t>La </a:t>
+              <a:t>自</a:t>
             </a:r>
             <a:r>
               <a:rPr sz="2800" b="1">
@@ -7864,7 +7873,7 @@
                 </a:solidFill>
                 <a:latin typeface="Nunito Sans"/>
               </a:rPr>
-              <a:t>ONU</a:t>
+              <a:t>1975年</a:t>
             </a:r>
             <a:r>
               <a:rPr sz="2800" b="0">
@@ -7873,16 +7882,7 @@
                 </a:solidFill>
                 <a:latin typeface="Nunito Sans"/>
               </a:rPr>
-              <a:t> lo celebra oficialmente desde </a:t>
-            </a:r>
-            <a:r>
-              <a:rPr sz="2800" b="1">
-                <a:solidFill>
-                  <a:srgbClr val="1F2A44"/>
-                </a:solidFill>
-                <a:latin typeface="Nunito Sans"/>
-              </a:rPr>
-              <a:t>1975</a:t>
+              <a:t>起正式庆祝这一天</a:t>
             </a:r>
           </a:p>
           <a:p>
@@ -7907,7 +7907,7 @@
                 </a:solidFill>
                 <a:latin typeface="Nunito Sans"/>
               </a:rPr>
-              <a:t>No es un día contra los hombres, sino </a:t>
+              <a:t>这不是反对男人的一天，而是</a:t>
             </a:r>
             <a:r>
               <a:rPr sz="2800" b="1">
@@ -7916,7 +7916,16 @@
                 </a:solidFill>
                 <a:latin typeface="Nunito Sans"/>
               </a:rPr>
-              <a:t>por la igualdad</a:t>
+              <a:t>为了平等</a:t>
+            </a:r>
+            <a:r>
+              <a:rPr sz="2800" b="0">
+                <a:solidFill>
+                  <a:srgbClr val="1F2A44"/>
+                </a:solidFill>
+                <a:latin typeface="Nunito Sans"/>
+              </a:rPr>
+              <a:t>的一天</a:t>
             </a:r>
           </a:p>
         </p:txBody>

--- a/curso/pptx/S82.pptx
+++ b/curso/pptx/S82.pptx
@@ -4232,7 +4232,7 @@
                 </a:solidFill>
                 <a:latin typeface="Nunito Sans"/>
               </a:rPr>
-              <a:t>Leire 读到：“平均来说，女性挣得比男性少。”她得出结论：“那么我妈妈做同样的工作，拿的钱就比她的男同事少。”</a:t>
+              <a:t>一个女孩读到：“平均来说，女性挣得比男性少。”她得出结论：“那么我妈妈做同样的工作，拿的钱就比她的男同事少。”</a:t>
             </a:r>
           </a:p>
         </p:txBody>
@@ -4922,7 +4922,7 @@
                 </a:solidFill>
                 <a:latin typeface="Nunito Sans"/>
               </a:rPr>
-              <a:t>Dylan：“工资差距是因为很多女性做非全日制工作。所以根本没有什么不平等。”</a:t>
+              <a:t>一个男孩：“工资差距是因为很多女性做非全日制工作。所以根本没有什么不平等。”</a:t>
             </a:r>
           </a:p>
         </p:txBody>
@@ -6469,7 +6469,7 @@
                 </a:solidFill>
                 <a:latin typeface="Nunito Sans"/>
               </a:rPr>
-              <a:t>Kevin：“女生和男生现在已经平等了。今天任何人都可以学自己想学的东西。”</a:t>
+              <a:t>一个男孩：“女生和男生现在已经平等了。今天任何人都可以学自己想学的东西。”</a:t>
             </a:r>
           </a:p>
         </p:txBody>
@@ -6869,7 +6869,7 @@
                           </a:solidFill>
                           <a:latin typeface="Nunito Sans"/>
                         </a:rPr>
-                        <a:t>Leire 个子高，Omar 个子矮。Iker 喜欢跳舞。</a:t>
+                        <a:t>一个女孩个子高，一个男孩个子矮。一个同学喜欢跳舞。</a:t>
                       </a:r>
                     </a:p>
                   </a:txBody>
